--- a/course/优化课程_FINO优化方法介绍.pptx
+++ b/course/优化课程_FINO优化方法介绍.pptx
@@ -13521,7 +13521,7 @@
                 <a:ea typeface="Microsoft YaHei"/>
                 <a:cs typeface="Microsoft YaHei"/>
               </a:rPr>
-              <a:t>噪声 schedule：代码 σ_t=0.1·e^{10(t−1)}，t=0.5 时 σ≈0.0009；论文 Eq.(7) 二次型在 t≈0.53 处 σ≈0.229（相差约 250×）</a:t>
+              <a:t>噪声 schedule：代码 σ_t=0.1·e^{10(t−1)}，t=0.5 时 σ≈0.0007；论文 Eq.(7) 二次型在 t≈0.5 处 σ≈0.229（相差约 340×）</a:t>
             </a:r>
           </a:p>
           <a:p>
@@ -13738,11 +13738,11 @@
                 <a:spcPct val="122000"/>
               </a:lnSpc>
               <a:spcAft>
-                <a:spcPts val="300"/>
+                <a:spcPts val="200"/>
               </a:spcAft>
             </a:pPr>
             <a:r>
-              <a:rPr sz="880" b="0">
+              <a:rPr sz="850" b="0">
                 <a:solidFill>
                   <a:srgbClr val="2E8B57"/>
                 </a:solidFill>
@@ -13753,7 +13753,7 @@
               <a:t>• </a:t>
             </a:r>
             <a:r>
-              <a:rPr sz="880" b="0">
+              <a:rPr sz="850" b="0">
                 <a:solidFill>
                   <a:srgbClr val="1B263B"/>
                 </a:solidFill>
@@ -13761,7 +13761,7 @@
                 <a:ea typeface="Microsoft YaHei"/>
                 <a:cs typeface="Microsoft YaHei"/>
               </a:rPr>
-              <a:t>论文 Eq.(7) 二次型 schedule：最终 0.04（在线崩溃），BC flow loss 0.42 vs 0.26</a:t>
+              <a:t>Eq.(7) 未缩放：0.04（在线崩溃）；峰值 0.229 = 官方 340×，BC flow loss 0.42</a:t>
             </a:r>
           </a:p>
           <a:p>
@@ -13770,11 +13770,11 @@
                 <a:spcPct val="122000"/>
               </a:lnSpc>
               <a:spcAft>
-                <a:spcPts val="300"/>
+                <a:spcPts val="200"/>
               </a:spcAft>
             </a:pPr>
             <a:r>
-              <a:rPr sz="880" b="0">
+              <a:rPr sz="850" b="0">
                 <a:solidFill>
                   <a:srgbClr val="2E8B57"/>
                 </a:solidFill>
@@ -13785,7 +13785,7 @@
               <a:t>• </a:t>
             </a:r>
             <a:r>
-              <a:rPr sz="880" b="0">
+              <a:rPr sz="850" b="0">
                 <a:solidFill>
                   <a:srgbClr val="1B263B"/>
                 </a:solidFill>
@@ -13793,7 +13793,7 @@
                 <a:ea typeface="Microsoft YaHei"/>
                 <a:cs typeface="Microsoft YaHei"/>
               </a:rPr>
-              <a:t>官方指数 schedule：1.00；无噪声 0.96；η=0.3 0.96 → 噪声不是越大越好</a:t>
+              <a:t>峰值归一化（0.1）→ 0.94；方差读法（σ=α²）→ 1.00：形状可用，缺归一化</a:t>
             </a:r>
           </a:p>
           <a:p>
@@ -13802,11 +13802,11 @@
                 <a:spcPct val="122000"/>
               </a:lnSpc>
               <a:spcAft>
-                <a:spcPts val="300"/>
+                <a:spcPts val="200"/>
               </a:spcAft>
             </a:pPr>
             <a:r>
-              <a:rPr sz="880" b="0">
+              <a:rPr sz="850" b="0">
                 <a:solidFill>
                   <a:srgbClr val="2E8B57"/>
                 </a:solidFill>
@@ -13817,7 +13817,7 @@
               <a:t>• </a:t>
             </a:r>
             <a:r>
-              <a:rPr sz="880" b="0">
+              <a:rPr sz="850" b="0">
                 <a:solidFill>
                   <a:srgbClr val="1B263B"/>
                 </a:solidFill>
@@ -13825,7 +13825,7 @@
                 <a:ea typeface="Microsoft YaHei"/>
                 <a:cs typeface="Microsoft YaHei"/>
               </a:rPr>
-              <a:t>β 论文 Eq.(9) 符号：0.96 vs 官方 0.94；固定 β=10：0.94 → 符号影响很小</a:t>
+              <a:t>崩溃可重复：seed1 0.12；humanoidmaze 0.00；官方 seed1 0.96</a:t>
             </a:r>
           </a:p>
           <a:p>
@@ -13834,11 +13834,11 @@
                 <a:spcPct val="122000"/>
               </a:lnSpc>
               <a:spcAft>
-                <a:spcPts val="300"/>
+                <a:spcPts val="200"/>
               </a:spcAft>
             </a:pPr>
             <a:r>
-              <a:rPr sz="880" b="0">
+              <a:rPr sz="850" b="0">
                 <a:solidFill>
                   <a:srgbClr val="2E8B57"/>
                 </a:solidFill>
@@ -13849,7 +13849,7 @@
               <a:t>• </a:t>
             </a:r>
             <a:r>
-              <a:rPr sz="880" b="0">
+              <a:rPr sz="850" b="0">
                 <a:solidFill>
                   <a:srgbClr val="1B263B"/>
                 </a:solidFill>
@@ -13857,7 +13857,7 @@
                 <a:ea typeface="Microsoft YaHei"/>
                 <a:cs typeface="Microsoft YaHei"/>
               </a:rPr>
-              <a:t>2D 机制：蒸馏 EMD 0.0004 / 5.38×，Q-guided d=6 +0.63，β 方向一致</a:t>
+              <a:t>Q-guided K=1/4/10：0.90/0.94/0.96；β 符号 0.94 vs 0.96（影响小）</a:t>
             </a:r>
           </a:p>
         </p:txBody>
@@ -13979,7 +13979,7 @@
               </a:lnSpc>
             </a:pPr>
             <a:r>
-              <a:rPr sz="1000" b="0">
+              <a:rPr sz="960" b="0">
                 <a:solidFill>
                   <a:srgbClr val="1B263B"/>
                 </a:solidFill>
@@ -13987,7 +13987,7 @@
                 <a:ea typeface="Microsoft YaHei"/>
                 <a:cs typeface="Microsoft YaHei"/>
               </a:rPr>
-              <a:t>这些结果把"论文公式 vs 实现"的差异变成了可复现实验：按论文 Eq.(7) 实现会破坏训练（0.04 vs 1.00），官方指数 schedule 才有效；β 符号方向影响很小。对优化方法的启示：噪声方差 schedule 是关键超参，β 对偶步长的鲁棒性较好；单 seed 但效应量级差异显著（0.04 vs 1.00）。</a:t>
+              <a:t>这些结果把"论文公式 vs 实现"的差异变成了可复现实验：按论文给定 η 字面实现 Eq.(7) 会破坏训练（0.04/0.12/0.00），但把峰值归一化到 0.1 后恢复到 0.94–1.00 → 问题在噪声幅度的归一化，而非二次型形状；β 符号方向影响很小。对优化方法的启示：噪声方差 schedule 的关键是"幅度标定"，β 对偶步长鲁棒。</a:t>
             </a:r>
           </a:p>
         </p:txBody>
